--- a/curso/pptx/S08.pptx
+++ b/curso/pptx/S08.pptx
@@ -5263,7 +5263,7 @@
                 </a:solidFill>
                 <a:latin typeface="Nunito Sans"/>
               </a:rPr>
-              <a:t>Cambiar lo que dijo la otra persona</a:t>
+              <a:t>改变对方说的话</a:t>
             </a:r>
           </a:p>
           <a:p>
@@ -5288,7 +5288,7 @@
                 </a:solidFill>
                 <a:latin typeface="Nunito Sans"/>
               </a:rPr>
-              <a:t>Añadir premisas que nadie pensaba</a:t>
+              <a:t>加上谁也没想到的前提</a:t>
             </a:r>
           </a:p>
           <a:p>
@@ -5313,7 +5313,7 @@
                 </a:solidFill>
                 <a:latin typeface="Nunito Sans"/>
               </a:rPr>
-              <a:t>Dejar insultos como si fueran razones</a:t>
+              <a:t>把侮辱当成理由留下来</a:t>
             </a:r>
           </a:p>
         </p:txBody>
@@ -5443,7 +5443,7 @@
                 </a:solidFill>
                 <a:latin typeface="Nunito Sans"/>
               </a:rPr>
-              <a:t>Respetar lo que dijo</a:t>
+              <a:t>尊重对方说的话</a:t>
             </a:r>
           </a:p>
           <a:p>
@@ -5468,7 +5468,7 @@
                 </a:solidFill>
                 <a:latin typeface="Nunito Sans"/>
               </a:rPr>
-              <a:t>Añadir solo lo que hace falta</a:t>
+              <a:t>只加上必须要加的</a:t>
             </a:r>
           </a:p>
           <a:p>
@@ -5493,7 +5493,7 @@
                 </a:solidFill>
                 <a:latin typeface="Nunito Sans"/>
               </a:rPr>
-              <a:t>Quitar lo que no es una razón</a:t>
+              <a:t>去掉不是理由的部分</a:t>
             </a:r>
           </a:p>
         </p:txBody>
@@ -7657,7 +7657,7 @@
                 </a:solidFill>
                 <a:latin typeface="Nunito Sans"/>
               </a:rPr>
-              <a:t>P1, P2…</a:t>
+              <a:t>P1、P2……</a:t>
             </a:r>
             <a:r>
               <a:rPr sz="2800" b="0">
@@ -7666,7 +7666,7 @@
                 </a:solidFill>
                 <a:latin typeface="Nunito Sans"/>
               </a:rPr>
-              <a:t> = las premisas</a:t>
+              <a:t> = 前提</a:t>
             </a:r>
           </a:p>
           <a:p>
@@ -7691,7 +7691,7 @@
                 </a:solidFill>
                 <a:latin typeface="Nunito Sans"/>
               </a:rPr>
-              <a:t>Una raya las separa</a:t>
+              <a:t>用一条横线把它们隔开</a:t>
             </a:r>
           </a:p>
           <a:p>
@@ -7725,7 +7725,7 @@
                 </a:solidFill>
                 <a:latin typeface="Nunito Sans"/>
               </a:rPr>
-              <a:t> = la conclusión</a:t>
+              <a:t> = 结论</a:t>
             </a:r>
           </a:p>
         </p:txBody>
@@ -7877,7 +7877,7 @@
                 </a:solidFill>
                 <a:latin typeface="Nunito Sans"/>
               </a:rPr>
-              <a:t>1. Busca la </a:t>
+              <a:t>1. 找</a:t>
             </a:r>
             <a:r>
               <a:rPr sz="2800" b="1">
@@ -7886,7 +7886,7 @@
                 </a:solidFill>
                 <a:latin typeface="Nunito Sans"/>
               </a:rPr>
-              <a:t>conclusión</a:t>
+              <a:t>结论</a:t>
             </a:r>
             <a:r>
               <a:rPr sz="2800" b="0">
@@ -7895,7 +7895,7 @@
                 </a:solidFill>
                 <a:latin typeface="Nunito Sans"/>
               </a:rPr>
-              <a:t>: ¿qué quiere que acepte?</a:t>
+              <a:t>：他想让我接受什么？</a:t>
             </a:r>
           </a:p>
           <a:p>
@@ -7920,7 +7920,7 @@
                 </a:solidFill>
                 <a:latin typeface="Nunito Sans"/>
               </a:rPr>
-              <a:t>2. Busca las </a:t>
+              <a:t>2. 找</a:t>
             </a:r>
             <a:r>
               <a:rPr sz="2800" b="1">
@@ -7929,7 +7929,7 @@
                 </a:solidFill>
                 <a:latin typeface="Nunito Sans"/>
               </a:rPr>
-              <a:t>premisas</a:t>
+              <a:t>前提</a:t>
             </a:r>
             <a:r>
               <a:rPr sz="2800" b="0">
@@ -7938,7 +7938,7 @@
                 </a:solidFill>
                 <a:latin typeface="Nunito Sans"/>
               </a:rPr>
-              <a:t>: ¿qué da para apoyarlo?</a:t>
+              <a:t>：他拿什么来支持它？</a:t>
             </a:r>
           </a:p>
           <a:p>
@@ -7963,7 +7963,7 @@
                 </a:solidFill>
                 <a:latin typeface="Nunito Sans"/>
               </a:rPr>
-              <a:t>3. Quita lo que </a:t>
+              <a:t>3. 去掉</a:t>
             </a:r>
             <a:r>
               <a:rPr sz="2800" b="1">
@@ -7972,7 +7972,7 @@
                 </a:solidFill>
                 <a:latin typeface="Nunito Sans"/>
               </a:rPr>
-              <a:t>sobra</a:t>
+              <a:t>多余</a:t>
             </a:r>
             <a:r>
               <a:rPr sz="2800" b="0">
@@ -7981,7 +7981,7 @@
                 </a:solidFill>
                 <a:latin typeface="Nunito Sans"/>
               </a:rPr>
-              <a:t>: adornos, repeticiones, insultos</a:t>
+              <a:t>的部分：装饰的话、重复、侮辱</a:t>
             </a:r>
           </a:p>
           <a:p>
@@ -8006,7 +8006,7 @@
                 </a:solidFill>
                 <a:latin typeface="Nunito Sans"/>
               </a:rPr>
-              <a:t>4. Pregunta qué </a:t>
+              <a:t>4. 问问缺了</a:t>
             </a:r>
             <a:r>
               <a:rPr sz="2800" b="1">
@@ -8015,7 +8015,7 @@
                 </a:solidFill>
                 <a:latin typeface="Nunito Sans"/>
               </a:rPr>
-              <a:t>falta</a:t>
+              <a:t>什么</a:t>
             </a:r>
             <a:r>
               <a:rPr sz="2800" b="0">
@@ -8024,7 +8024,7 @@
                 </a:solidFill>
                 <a:latin typeface="Nunito Sans"/>
               </a:rPr>
-              <a:t>: ¿hay una premisa oculta?</a:t>
+              <a:t>：有没有隐藏前提？</a:t>
             </a:r>
           </a:p>
         </p:txBody>
@@ -8276,7 +8276,7 @@
                 </a:solidFill>
                 <a:latin typeface="Nunito Sans"/>
               </a:rPr>
-              <a:t>También se llama premisa </a:t>
+              <a:t>它也叫</a:t>
             </a:r>
             <a:r>
               <a:rPr sz="2800" b="1">
@@ -8285,7 +8285,16 @@
                 </a:solidFill>
                 <a:latin typeface="Nunito Sans"/>
               </a:rPr>
-              <a:t>implícita</a:t>
+              <a:t>隐含</a:t>
+            </a:r>
+            <a:r>
+              <a:rPr sz="2800" b="0">
+                <a:solidFill>
+                  <a:srgbClr val="1F2A44"/>
+                </a:solidFill>
+                <a:latin typeface="Nunito Sans"/>
+              </a:rPr>
+              <a:t>前提</a:t>
             </a:r>
           </a:p>
           <a:p>
@@ -8310,7 +8319,7 @@
                 </a:solidFill>
                 <a:latin typeface="Nunito Sans"/>
               </a:rPr>
-              <a:t>Pregunta: «¿qué tendría que ser verdad para que esto funcione?»</a:t>
+              <a:t>问：“要让这个论证成立，什么必须是真的？”</a:t>
             </a:r>
           </a:p>
           <a:p>
@@ -8335,7 +8344,7 @@
                 </a:solidFill>
                 <a:latin typeface="Nunito Sans"/>
               </a:rPr>
-              <a:t>A veces es la parte más dudosa</a:t>
+              <a:t>有时它正是最可疑的部分</a:t>
             </a:r>
           </a:p>
         </p:txBody>

--- a/curso/pptx/S08.pptx
+++ b/curso/pptx/S08.pptx
@@ -4475,7 +4475,7 @@
                 </a:solidFill>
                 <a:latin typeface="Nunito Sans"/>
               </a:rPr>
-              <a:t>“伊克尔不可能当守门员：他戴眼镜。”</a:t>
+              <a:t>“一个男孩不可能当守门员：他戴眼镜。”</a:t>
             </a:r>
           </a:p>
         </p:txBody>
@@ -4523,7 +4523,7 @@
                 </a:solidFill>
                 <a:latin typeface="Nunito Sans"/>
               </a:rPr>
-              <a:t>C：伊克尔不可能当守门员。P1：伊克尔戴眼镜。</a:t>
+              <a:t>C：一个男孩不可能当守门员。P1：他戴眼镜。</a:t>
             </a:r>
           </a:p>
           <a:p>
@@ -5679,7 +5679,7 @@
                 </a:solidFill>
                 <a:latin typeface="Nunito Sans"/>
               </a:rPr>
-              <a:t>“凯文不能骑他叔叔的摩托车：他才 13 岁。”</a:t>
+              <a:t>“一个男孩不能骑他叔叔的摩托车：他才 13 岁。”</a:t>
             </a:r>
           </a:p>
         </p:txBody>
@@ -7262,7 +7262,7 @@
                 </a:solidFill>
                 <a:latin typeface="Nunito Sans"/>
               </a:rPr>
-              <a:t>“伊克尔不可能当守门员：他戴眼镜。”</a:t>
+              <a:t>“一个男孩不可能当守门员：他戴眼镜。”</a:t>
             </a:r>
           </a:p>
         </p:txBody>
